--- a/decks/geog-rivers/geog-rivers_ch3_river-at-work.pptx
+++ b/decks/geog-rivers/geog-rivers_ch3_river-at-work.pptx
@@ -125,29 +125,29 @@
   <p:extLst>
     <p:ext uri="{521415D9-36F7-43E2-AB2F-B90AF26B5E84}">
       <p14:sectionLst xmlns:p14="http://schemas.microsoft.com/office/powerpoint/2010/main">
-        <p14:section name="Opening" id="{905650f9-4775-0ee7-5440-63e49e40dd6f}">
+        <p14:section name="Opening" id="{af96a4c5-017d-cb16-58b5-2f66136e983e}">
           <p14:sldIdLst>
             <p14:sldId id="256"/>
           </p14:sldIdLst>
         </p14:section>
-        <p14:section name="Gate" id="{b9572f70-b912-1c5b-6fa3-2ed274863907}">
+        <p14:section name="Gate" id="{bf4f5210-8467-6e39-3b6f-56cdba4b821e}">
           <p14:sldIdLst>
             <p14:sldId id="257"/>
             <p14:sldId id="258"/>
           </p14:sldIdLst>
         </p14:section>
-        <p14:section name="Pre-teach" id="{2ccefd29-d465-267f-7b07-c267ee49633f}">
+        <p14:section name="Pre-teach" id="{7f3601af-9406-46ec-3907-33f59e22a446}">
           <p14:sldIdLst>
             <p14:sldId id="259"/>
           </p14:sldIdLst>
         </p14:section>
-        <p14:section name="Read-along" id="{0b023ab5-99cb-298d-6046-a56c06eea69a}">
+        <p14:section name="Read-along" id="{41364707-bd41-8dd1-b33d-8a3b955fcc3b}">
           <p14:sldIdLst>
             <p14:sldId id="260"/>
             <p14:sldId id="261"/>
           </p14:sldIdLst>
         </p14:section>
-        <p14:section name="Teach" id="{469e703a-85e8-30f3-7976-547f720f8fea}">
+        <p14:section name="Teach" id="{ba469619-d080-0dc2-2bb5-fec20d49cf9e}">
           <p14:sldIdLst>
             <p14:sldId id="262"/>
             <p14:sldId id="263"/>
@@ -156,7 +156,7 @@
             <p14:sldId id="266"/>
           </p14:sldIdLst>
         </p14:section>
-        <p14:section name="Routes" id="{22c20015-e328-b6f1-c7d0-8d5e9ce4971a}">
+        <p14:section name="Routes" id="{4948ceec-2042-a206-f6f1-01811ce9afd8}">
           <p14:sldIdLst>
             <p14:sldId id="267"/>
             <p14:sldId id="268"/>
@@ -164,12 +164,12 @@
             <p14:sldId id="270"/>
           </p14:sldIdLst>
         </p14:section>
-        <p14:section name="Close" id="{02d8d7d7-f819-775b-21dc-121d62c7ce4b}">
+        <p14:section name="Close" id="{0aa348ef-3e83-16fc-f521-e6e95fb08f05}">
           <p14:sldIdLst>
             <p14:sldId id="271"/>
           </p14:sldIdLst>
         </p14:section>
-        <p14:section name="Answers" id="{6e39afd3-36af-3a50-370b-e685d3e9e514}">
+        <p14:section name="Answers" id="{c23d4692-9ea4-1a51-afbc-8b4fdcd71985}">
           <p14:sldIdLst>
             <p14:sldId id="272"/>
             <p14:sldId id="273"/>
@@ -1598,7 +1598,7 @@
               <a:t>Do now — retrieval. Silent, no notes, no help: recall comes before any support. Give about four minutes.
 1. Which erosion process is the sheer force of the water hitting the river's banks and bed?  →  A   Hydraulic action
 2. Rocks carried by the river knock into each other and break into smaller, rounder pieces. This is ___.  →  attrition
-3. When does a river deposit its load?  →  A   When it slows down and loses energy
+3. When does a river deposit its load?  →  C   When it slows down and loses energy
 Circulate: who gets 3/3 (Stretch route), 2/3 (Core), 0–1 (Support)? Use this to route pupils later in the lesson.</a:t>
             </a:r>
             <a:endParaRPr lang="en-US" dirty="0"/>
@@ -1690,7 +1690,7 @@
               <a:t>Answers — pupils mark their own in a different colour, then hands up for 3/3, 2/3, 1/3.
 1. A   Hydraulic action. Hydraulic action is erosion by the force of the water itself.
 2. attrition. Attrition is load hitting load; it makes pebbles smaller and smoother.
-3. A   When it slows down and loses energy. A river needs energy to carry material; when it slows and loses energy, it drops the load.
+3. C   When it slows down and loses energy. A river needs energy to carry material; when it slows and loses energy, it drops the load.
 Say the route each score points to: 3/3 Stretch, 2/3 Core, 0–1 Support. Pupils may choose to move up.</a:t>
             </a:r>
             <a:endParaRPr lang="en-US" dirty="0"/>
@@ -7811,35 +7811,35 @@
                 <a:ea typeface="Calibri" pitchFamily="34" charset="-122"/>
                 <a:cs typeface="Calibri" pitchFamily="34" charset="-120"/>
               </a:rPr>
+              <a:t>Suspension      </a:t>
+            </a:r>
+            <a:pPr algn="ctr" indent="0" marL="0">
+              <a:buNone/>
+            </a:pPr>
+            <a:r>
+              <a:rPr lang="en-US" sz="2400" b="1" dirty="0">
+                <a:solidFill>
+                  <a:srgbClr val="B8862B"/>
+                </a:solidFill>
+                <a:latin typeface="Calibri" pitchFamily="34" charset="0"/>
+                <a:ea typeface="Calibri" pitchFamily="34" charset="-122"/>
+                <a:cs typeface="Calibri" pitchFamily="34" charset="-120"/>
+              </a:rPr>
+              <a:t>C  </a:t>
+            </a:r>
+            <a:pPr algn="ctr" indent="0" marL="0">
+              <a:buNone/>
+            </a:pPr>
+            <a:r>
+              <a:rPr lang="en-US" sz="2400" dirty="0">
+                <a:solidFill>
+                  <a:srgbClr val="1E2229"/>
+                </a:solidFill>
+                <a:latin typeface="Calibri" pitchFamily="34" charset="0"/>
+                <a:ea typeface="Calibri" pitchFamily="34" charset="-122"/>
+                <a:cs typeface="Calibri" pitchFamily="34" charset="-120"/>
+              </a:rPr>
               <a:t>Traction      </a:t>
-            </a:r>
-            <a:pPr algn="ctr" indent="0" marL="0">
-              <a:buNone/>
-            </a:pPr>
-            <a:r>
-              <a:rPr lang="en-US" sz="2400" b="1" dirty="0">
-                <a:solidFill>
-                  <a:srgbClr val="B8862B"/>
-                </a:solidFill>
-                <a:latin typeface="Calibri" pitchFamily="34" charset="0"/>
-                <a:ea typeface="Calibri" pitchFamily="34" charset="-122"/>
-                <a:cs typeface="Calibri" pitchFamily="34" charset="-120"/>
-              </a:rPr>
-              <a:t>C  </a:t>
-            </a:r>
-            <a:pPr algn="ctr" indent="0" marL="0">
-              <a:buNone/>
-            </a:pPr>
-            <a:r>
-              <a:rPr lang="en-US" sz="2400" dirty="0">
-                <a:solidFill>
-                  <a:srgbClr val="1E2229"/>
-                </a:solidFill>
-                <a:latin typeface="Calibri" pitchFamily="34" charset="0"/>
-                <a:ea typeface="Calibri" pitchFamily="34" charset="-122"/>
-                <a:cs typeface="Calibri" pitchFamily="34" charset="-120"/>
-              </a:rPr>
-              <a:t>Suspension      </a:t>
             </a:r>
             <a:pPr algn="ctr" indent="0" marL="0">
               <a:buNone/>
@@ -11572,7 +11572,7 @@
                 <a:ea typeface="Calibri" pitchFamily="34" charset="-122"/>
                 <a:cs typeface="Calibri" pitchFamily="34" charset="-120"/>
               </a:rPr>
-              <a:t>Abrasion</a:t>
+              <a:t>Solution</a:t>
             </a:r>
             <a:endParaRPr lang="en-US" sz="2400" dirty="0"/>
           </a:p>
@@ -11609,7 +11609,7 @@
                 <a:ea typeface="Calibri" pitchFamily="34" charset="-122"/>
                 <a:cs typeface="Calibri" pitchFamily="34" charset="-120"/>
               </a:rPr>
-              <a:t>Attrition</a:t>
+              <a:t>Abrasion</a:t>
             </a:r>
             <a:endParaRPr lang="en-US" sz="2400" dirty="0"/>
           </a:p>
@@ -11646,7 +11646,7 @@
                 <a:ea typeface="Calibri" pitchFamily="34" charset="-122"/>
                 <a:cs typeface="Calibri" pitchFamily="34" charset="-120"/>
               </a:rPr>
-              <a:t>Solution</a:t>
+              <a:t>Attrition</a:t>
             </a:r>
             <a:endParaRPr lang="en-US" sz="2400" dirty="0"/>
           </a:p>
@@ -12048,7 +12048,7 @@
                 <a:ea typeface="Calibri" pitchFamily="34" charset="-122"/>
                 <a:cs typeface="Calibri" pitchFamily="34" charset="-120"/>
               </a:rPr>
-              <a:t>When it slows down and loses energy</a:t>
+              <a:t>When it rains heavily</a:t>
             </a:r>
             <a:endParaRPr lang="en-US" sz="2200" dirty="0"/>
           </a:p>
@@ -12085,7 +12085,7 @@
                 <a:ea typeface="Calibri" pitchFamily="34" charset="-122"/>
                 <a:cs typeface="Calibri" pitchFamily="34" charset="-120"/>
               </a:rPr>
-              <a:t>When it speeds up and gains energy</a:t>
+              <a:t>When it reaches a waterfall</a:t>
             </a:r>
             <a:endParaRPr lang="en-US" sz="2200" dirty="0"/>
           </a:p>
@@ -12122,7 +12122,7 @@
                 <a:ea typeface="Calibri" pitchFamily="34" charset="-122"/>
                 <a:cs typeface="Calibri" pitchFamily="34" charset="-120"/>
               </a:rPr>
-              <a:t>When it reaches a waterfall</a:t>
+              <a:t>When it slows down and loses energy</a:t>
             </a:r>
             <a:endParaRPr lang="en-US" sz="2200" dirty="0"/>
           </a:p>
@@ -12159,7 +12159,7 @@
                 <a:ea typeface="Calibri" pitchFamily="34" charset="-122"/>
                 <a:cs typeface="Calibri" pitchFamily="34" charset="-120"/>
               </a:rPr>
-              <a:t>When it rains heavily</a:t>
+              <a:t>When it speeds up and gains energy</a:t>
             </a:r>
             <a:endParaRPr lang="en-US" sz="2200" dirty="0"/>
           </a:p>
@@ -13060,7 +13060,7 @@
                 <a:ea typeface="Calibri" pitchFamily="34" charset="-122"/>
                 <a:cs typeface="Calibri" pitchFamily="34" charset="-120"/>
               </a:rPr>
-              <a:t>A   When it slows down and loses energy</a:t>
+              <a:t>C   When it slows down and loses energy</a:t>
             </a:r>
             <a:endParaRPr lang="en-US" sz="2200" dirty="0"/>
           </a:p>

--- a/decks/geog-rivers/geog-rivers_ch3_river-at-work.pptx
+++ b/decks/geog-rivers/geog-rivers_ch3_river-at-work.pptx
@@ -125,29 +125,29 @@
   <p:extLst>
     <p:ext uri="{521415D9-36F7-43E2-AB2F-B90AF26B5E84}">
       <p14:sectionLst xmlns:p14="http://schemas.microsoft.com/office/powerpoint/2010/main">
-        <p14:section name="Opening" id="{af96a4c5-017d-cb16-58b5-2f66136e983e}">
+        <p14:section name="Opening" id="{3a273ec8-85e0-d802-5aca-2072c946cc76}">
           <p14:sldIdLst>
             <p14:sldId id="256"/>
           </p14:sldIdLst>
         </p14:section>
-        <p14:section name="Gate" id="{bf4f5210-8467-6e39-3b6f-56cdba4b821e}">
+        <p14:section name="Gate" id="{a3bedd17-9d19-c0ec-bd59-43476b57971c}">
           <p14:sldIdLst>
             <p14:sldId id="257"/>
             <p14:sldId id="258"/>
           </p14:sldIdLst>
         </p14:section>
-        <p14:section name="Pre-teach" id="{7f3601af-9406-46ec-3907-33f59e22a446}">
+        <p14:section name="Pre-teach" id="{21631750-8b5b-723a-2153-6c08dfdc80aa}">
           <p14:sldIdLst>
             <p14:sldId id="259"/>
           </p14:sldIdLst>
         </p14:section>
-        <p14:section name="Read-along" id="{41364707-bd41-8dd1-b33d-8a3b955fcc3b}">
+        <p14:section name="Read-along" id="{1936e2e1-46ec-fd35-65c8-f4469501973c}">
           <p14:sldIdLst>
             <p14:sldId id="260"/>
             <p14:sldId id="261"/>
           </p14:sldIdLst>
         </p14:section>
-        <p14:section name="Teach" id="{ba469619-d080-0dc2-2bb5-fec20d49cf9e}">
+        <p14:section name="Teach" id="{15026903-c0d6-5a0c-e915-e7aaf84ae8c4}">
           <p14:sldIdLst>
             <p14:sldId id="262"/>
             <p14:sldId id="263"/>
@@ -156,7 +156,7 @@
             <p14:sldId id="266"/>
           </p14:sldIdLst>
         </p14:section>
-        <p14:section name="Routes" id="{4948ceec-2042-a206-f6f1-01811ce9afd8}">
+        <p14:section name="Routes" id="{2ecd96b9-2fb6-a55c-d40d-1dd9458b7aaa}">
           <p14:sldIdLst>
             <p14:sldId id="267"/>
             <p14:sldId id="268"/>
@@ -164,12 +164,12 @@
             <p14:sldId id="270"/>
           </p14:sldIdLst>
         </p14:section>
-        <p14:section name="Close" id="{0aa348ef-3e83-16fc-f521-e6e95fb08f05}">
+        <p14:section name="Close" id="{72437731-74fc-13da-04fb-20c382c948e2}">
           <p14:sldIdLst>
             <p14:sldId id="271"/>
           </p14:sldIdLst>
         </p14:section>
-        <p14:section name="Answers" id="{c23d4692-9ea4-1a51-afbc-8b4fdcd71985}">
+        <p14:section name="Answers" id="{a4e9442b-b845-6222-3953-a51da7c6760d}">
           <p14:sldIdLst>
             <p14:sldId id="272"/>
             <p14:sldId id="273"/>
